--- a/my_submission_battleV2/DaehoV2_design.pptx
+++ b/my_submission_battleV2/DaehoV2_design.pptx
@@ -4,6 +4,9 @@
   <p:sldMasterIdLst>
     <p:sldMasterId id="2147483648" r:id="rId1"/>
   </p:sldMasterIdLst>
+  <p:notesMasterIdLst>
+    <p:notesMasterId r:id="rId7"/>
+  </p:notesMasterIdLst>
   <p:sldIdLst>
     <p:sldId id="256" r:id="rId2"/>
     <p:sldId id="257" r:id="rId3"/>
@@ -11,10 +14,7 @@
     <p:sldId id="259" r:id="rId5"/>
     <p:sldId id="260" r:id="rId6"/>
   </p:sldIdLst>
-  <p:notesMasterIdLst>
-    <p:notesMasterId r:id="rId7"/>
-  </p:notesMasterIdLst>
-  <p:sldSz cx="9144000" cy="5143500"/>
+  <p:sldSz cx="9144000" cy="5143500" type="screen16x9"/>
   <p:notesSz cx="5143500" cy="9144000"/>
   <p:defaultTextStyle>
     <a:lvl1pPr marL="0" algn="l" defTabSz="914400" rtl="0" eaLnBrk="1" latinLnBrk="0" hangingPunct="1">
@@ -108,6 +108,11 @@
       </a:defRPr>
     </a:lvl9pPr>
   </p:defaultTextStyle>
+  <p:extLst>
+    <p:ext uri="{EFAFB233-063F-42B5-8137-9DF3F51BA10A}">
+      <p15:sldGuideLst xmlns:p15="http://schemas.microsoft.com/office/powerpoint/2012/main"/>
+    </p:ext>
+  </p:extLst>
 </p:presentation>
 </file>
 
@@ -133,240 +138,16 @@
           <a:chExt cx="0" cy="0"/>
         </a:xfrm>
       </p:grpSpPr>
-      <p:sp>
-        <p:nvSpPr>
-          <p:cNvPr id="2" name="Header Placeholder 1"/>
-          <p:cNvSpPr>
-            <a:spLocks noGrp="1"/>
-          </p:cNvSpPr>
-          <p:nvPr>
-            <p:ph type="hdr" sz="quarter"/>
-          </p:nvPr>
-        </p:nvSpPr>
-        <p:spPr>
-          <a:xfrm>
-            <a:off x="0" y="0"/>
-            <a:ext cx="2971800" cy="458788"/>
-          </a:xfrm>
-          <a:prstGeom prst="rect">
-            <a:avLst/>
-          </a:prstGeom>
-        </p:spPr>
-        <p:txBody>
-          <a:bodyPr vert="horz" lIns="91440" tIns="45720" rIns="91440" bIns="45720" rtlCol="0"/>
-          <a:lstStyle>
-            <a:lvl1pPr algn="l">
-              <a:defRPr sz="1200"/>
-            </a:lvl1pPr>
-          </a:lstStyle>
-          <a:p>
-            <a:endParaRPr lang="en-US"/>
-          </a:p>
-        </p:txBody>
-      </p:sp>
-      <p:sp>
-        <p:nvSpPr>
-          <p:cNvPr id="3" name="Date Placeholder 2"/>
-          <p:cNvSpPr>
-            <a:spLocks noGrp="1"/>
-          </p:cNvSpPr>
-          <p:nvPr>
-            <p:ph type="dt" idx="1"/>
-          </p:nvPr>
-        </p:nvSpPr>
-        <p:spPr>
-          <a:xfrm>
-            <a:off x="3884613" y="0"/>
-            <a:ext cx="2971800" cy="458788"/>
-          </a:xfrm>
-          <a:prstGeom prst="rect">
-            <a:avLst/>
-          </a:prstGeom>
-        </p:spPr>
-        <p:txBody>
-          <a:bodyPr vert="horz" lIns="91440" tIns="45720" rIns="91440" bIns="45720" rtlCol="0"/>
-          <a:lstStyle>
-            <a:lvl1pPr algn="r">
-              <a:defRPr sz="1200"/>
-            </a:lvl1pPr>
-          </a:lstStyle>
-          <a:p>
-            <a:fld id="{5282F153-3F37-0F45-9E97-73ACFA13230C}" type="datetimeFigureOut">
-              <a:rPr lang="en-US"/>
-              <a:t>7/23/19</a:t>
-            </a:fld>
-            <a:endParaRPr lang="en-US"/>
-          </a:p>
-        </p:txBody>
-      </p:sp>
-      <p:sp>
-        <p:nvSpPr>
-          <p:cNvPr id="4" name="Slide Image Placeholder 3"/>
-          <p:cNvSpPr>
-            <a:spLocks noGrp="1" noRot="1" noChangeAspect="1"/>
-          </p:cNvSpPr>
-          <p:nvPr>
-            <p:ph type="sldImg" idx="2"/>
-          </p:nvPr>
-        </p:nvSpPr>
-        <p:spPr>
-          <a:xfrm>
-            <a:off x="685800" y="1143000"/>
-            <a:ext cx="5486400" cy="3086100"/>
-          </a:xfrm>
-          <a:prstGeom prst="rect">
-            <a:avLst/>
-          </a:prstGeom>
-          <a:noFill/>
-          <a:ln w="12700">
-            <a:solidFill>
-              <a:prstClr val="black"/>
-            </a:solidFill>
-          </a:ln>
-        </p:spPr>
-        <p:txBody>
-          <a:bodyPr vert="horz" lIns="91440" tIns="45720" rIns="91440" bIns="45720" rtlCol="0" anchor="ctr"/>
-          <a:lstStyle/>
-          <a:p>
-            <a:endParaRPr lang="en-US"/>
-          </a:p>
-        </p:txBody>
-      </p:sp>
-      <p:sp>
-        <p:nvSpPr>
-          <p:cNvPr id="5" name="Notes Placeholder 4"/>
-          <p:cNvSpPr>
-            <a:spLocks noGrp="1"/>
-          </p:cNvSpPr>
-          <p:nvPr>
-            <p:ph type="body" sz="quarter" idx="3"/>
-          </p:nvPr>
-        </p:nvSpPr>
-        <p:spPr>
-          <a:xfrm>
-            <a:off x="685800" y="4400550"/>
-            <a:ext cx="5486400" cy="3600450"/>
-          </a:xfrm>
-          <a:prstGeom prst="rect">
-            <a:avLst/>
-          </a:prstGeom>
-        </p:spPr>
-        <p:txBody>
-          <a:bodyPr vert="horz" lIns="91440" tIns="45720" rIns="91440" bIns="45720" rtlCol="0"/>
-          <a:lstStyle/>
-          <a:p>
-            <a:pPr lvl="0"/>
-            <a:r>
-              <a:rPr lang="en-US"/>
-              <a:t>Click to edit Master text styles</a:t>
-            </a:r>
-          </a:p>
-          <a:p>
-            <a:pPr lvl="1"/>
-            <a:r>
-              <a:rPr lang="en-US"/>
-              <a:t>Second level</a:t>
-            </a:r>
-          </a:p>
-          <a:p>
-            <a:pPr lvl="2"/>
-            <a:r>
-              <a:rPr lang="en-US"/>
-              <a:t>Third level</a:t>
-            </a:r>
-          </a:p>
-          <a:p>
-            <a:pPr lvl="3"/>
-            <a:r>
-              <a:rPr lang="en-US"/>
-              <a:t>Fourth level</a:t>
-            </a:r>
-          </a:p>
-          <a:p>
-            <a:pPr lvl="4"/>
-            <a:r>
-              <a:rPr lang="en-US"/>
-              <a:t>Fifth level</a:t>
-            </a:r>
-          </a:p>
-        </p:txBody>
-      </p:sp>
-      <p:sp>
-        <p:nvSpPr>
-          <p:cNvPr id="6" name="Footer Placeholder 5"/>
-          <p:cNvSpPr>
-            <a:spLocks noGrp="1"/>
-          </p:cNvSpPr>
-          <p:nvPr>
-            <p:ph type="ftr" sz="quarter" idx="4"/>
-          </p:nvPr>
-        </p:nvSpPr>
-        <p:spPr>
-          <a:xfrm>
-            <a:off x="0" y="8685213"/>
-            <a:ext cx="2971800" cy="458787"/>
-          </a:xfrm>
-          <a:prstGeom prst="rect">
-            <a:avLst/>
-          </a:prstGeom>
-        </p:spPr>
-        <p:txBody>
-          <a:bodyPr vert="horz" lIns="91440" tIns="45720" rIns="91440" bIns="45720" rtlCol="0" anchor="b"/>
-          <a:lstStyle>
-            <a:lvl1pPr algn="l">
-              <a:defRPr sz="1200"/>
-            </a:lvl1pPr>
-          </a:lstStyle>
-          <a:p>
-            <a:endParaRPr lang="en-US"/>
-          </a:p>
-        </p:txBody>
-      </p:sp>
-      <p:sp>
-        <p:nvSpPr>
-          <p:cNvPr id="7" name="Slide Number Placeholder 6"/>
-          <p:cNvSpPr>
-            <a:spLocks noGrp="1"/>
-          </p:cNvSpPr>
-          <p:nvPr>
-            <p:ph type="sldNum" sz="quarter" idx="5"/>
-          </p:nvPr>
-        </p:nvSpPr>
-        <p:spPr>
-          <a:xfrm>
-            <a:off x="3884613" y="8685213"/>
-            <a:ext cx="2971800" cy="458787"/>
-          </a:xfrm>
-          <a:prstGeom prst="rect">
-            <a:avLst/>
-          </a:prstGeom>
-        </p:spPr>
-        <p:txBody>
-          <a:bodyPr vert="horz" lIns="91440" tIns="45720" rIns="91440" bIns="45720" rtlCol="0" anchor="b"/>
-          <a:lstStyle>
-            <a:lvl1pPr algn="r">
-              <a:defRPr sz="1200"/>
-            </a:lvl1pPr>
-          </a:lstStyle>
-          <a:p>
-            <a:fld id="{CE5E9CC1-C706-0F49-92D6-E571CC5EEA8F}" type="slidenum">
-              <a:rPr lang="en-US"/>
-              <a:t>‹#›</a:t>
-            </a:fld>
-            <a:endParaRPr lang="en-US"/>
-          </a:p>
-        </p:txBody>
-      </p:sp>
     </p:spTree>
     <p:extLst>
       <p:ext uri="{BB962C8B-B14F-4D97-AF65-F5344CB8AC3E}">
-        <p14:creationId xmlns:p14="http://schemas.microsoft.com/office/powerpoint/2010/main" val="1024086991"/>
+        <p14:creationId xmlns:p14="http://schemas.microsoft.com/office/powerpoint/2010/main" val="133930836"/>
       </p:ext>
     </p:extLst>
   </p:cSld>
   <p:clrMap bg1="lt1" tx1="dk1" bg2="lt2" tx2="dk2" accent1="accent1" accent2="accent2" accent3="accent3" accent4="accent4" accent5="accent5" accent6="accent6" hlink="hlink" folHlink="folHlink"/>
   <p:notesStyle>
-    <a:lvl1pPr marL="0" algn="l" defTabSz="914400" rtl="0" eaLnBrk="1" latinLnBrk="0" hangingPunct="1">
+    <a:lvl1pPr marL="0" algn="l" defTabSz="914400" rtl="0" eaLnBrk="1" latinLnBrk="1" hangingPunct="1">
       <a:defRPr sz="1200" kern="1200">
         <a:solidFill>
           <a:schemeClr val="tx1"/>
@@ -376,7 +157,7 @@
         <a:cs typeface="+mn-cs"/>
       </a:defRPr>
     </a:lvl1pPr>
-    <a:lvl2pPr marL="457200" algn="l" defTabSz="914400" rtl="0" eaLnBrk="1" latinLnBrk="0" hangingPunct="1">
+    <a:lvl2pPr marL="457200" algn="l" defTabSz="914400" rtl="0" eaLnBrk="1" latinLnBrk="1" hangingPunct="1">
       <a:defRPr sz="1200" kern="1200">
         <a:solidFill>
           <a:schemeClr val="tx1"/>
@@ -386,7 +167,7 @@
         <a:cs typeface="+mn-cs"/>
       </a:defRPr>
     </a:lvl2pPr>
-    <a:lvl3pPr marL="914400" algn="l" defTabSz="914400" rtl="0" eaLnBrk="1" latinLnBrk="0" hangingPunct="1">
+    <a:lvl3pPr marL="914400" algn="l" defTabSz="914400" rtl="0" eaLnBrk="1" latinLnBrk="1" hangingPunct="1">
       <a:defRPr sz="1200" kern="1200">
         <a:solidFill>
           <a:schemeClr val="tx1"/>
@@ -396,7 +177,7 @@
         <a:cs typeface="+mn-cs"/>
       </a:defRPr>
     </a:lvl3pPr>
-    <a:lvl4pPr marL="1371600" algn="l" defTabSz="914400" rtl="0" eaLnBrk="1" latinLnBrk="0" hangingPunct="1">
+    <a:lvl4pPr marL="1371600" algn="l" defTabSz="914400" rtl="0" eaLnBrk="1" latinLnBrk="1" hangingPunct="1">
       <a:defRPr sz="1200" kern="1200">
         <a:solidFill>
           <a:schemeClr val="tx1"/>
@@ -406,7 +187,7 @@
         <a:cs typeface="+mn-cs"/>
       </a:defRPr>
     </a:lvl4pPr>
-    <a:lvl5pPr marL="1828800" algn="l" defTabSz="914400" rtl="0" eaLnBrk="1" latinLnBrk="0" hangingPunct="1">
+    <a:lvl5pPr marL="1828800" algn="l" defTabSz="914400" rtl="0" eaLnBrk="1" latinLnBrk="1" hangingPunct="1">
       <a:defRPr sz="1200" kern="1200">
         <a:solidFill>
           <a:schemeClr val="tx1"/>
@@ -416,7 +197,7 @@
         <a:cs typeface="+mn-cs"/>
       </a:defRPr>
     </a:lvl5pPr>
-    <a:lvl6pPr marL="2286000" algn="l" defTabSz="914400" rtl="0" eaLnBrk="1" latinLnBrk="0" hangingPunct="1">
+    <a:lvl6pPr marL="2286000" algn="l" defTabSz="914400" rtl="0" eaLnBrk="1" latinLnBrk="1" hangingPunct="1">
       <a:defRPr sz="1200" kern="1200">
         <a:solidFill>
           <a:schemeClr val="tx1"/>
@@ -426,7 +207,7 @@
         <a:cs typeface="+mn-cs"/>
       </a:defRPr>
     </a:lvl6pPr>
-    <a:lvl7pPr marL="2743200" algn="l" defTabSz="914400" rtl="0" eaLnBrk="1" latinLnBrk="0" hangingPunct="1">
+    <a:lvl7pPr marL="2743200" algn="l" defTabSz="914400" rtl="0" eaLnBrk="1" latinLnBrk="1" hangingPunct="1">
       <a:defRPr sz="1200" kern="1200">
         <a:solidFill>
           <a:schemeClr val="tx1"/>
@@ -436,7 +217,7 @@
         <a:cs typeface="+mn-cs"/>
       </a:defRPr>
     </a:lvl7pPr>
-    <a:lvl8pPr marL="3200400" algn="l" defTabSz="914400" rtl="0" eaLnBrk="1" latinLnBrk="0" hangingPunct="1">
+    <a:lvl8pPr marL="3200400" algn="l" defTabSz="914400" rtl="0" eaLnBrk="1" latinLnBrk="1" hangingPunct="1">
       <a:defRPr sz="1200" kern="1200">
         <a:solidFill>
           <a:schemeClr val="tx1"/>
@@ -446,7 +227,7 @@
         <a:cs typeface="+mn-cs"/>
       </a:defRPr>
     </a:lvl8pPr>
-    <a:lvl9pPr marL="3657600" algn="l" defTabSz="914400" rtl="0" eaLnBrk="1" latinLnBrk="0" hangingPunct="1">
+    <a:lvl9pPr marL="3657600" algn="l" defTabSz="914400" rtl="0" eaLnBrk="1" latinLnBrk="1" hangingPunct="1">
       <a:defRPr sz="1200" kern="1200">
         <a:solidFill>
           <a:schemeClr val="tx1"/>
@@ -504,10 +285,6 @@
           <a:bodyPr/>
           <a:lstStyle/>
           <a:p>
-            <a:r>
-              <a:rPr lang="en-US" dirty="0"/>
-              <a:t/>
-            </a:r>
             <a:endParaRPr lang="en-US" dirty="0"/>
           </a:p>
         </p:txBody>
@@ -592,10 +369,6 @@
           <a:bodyPr/>
           <a:lstStyle/>
           <a:p>
-            <a:r>
-              <a:rPr lang="en-US" dirty="0"/>
-              <a:t/>
-            </a:r>
             <a:endParaRPr lang="en-US" dirty="0"/>
           </a:p>
         </p:txBody>
@@ -680,10 +453,6 @@
           <a:bodyPr/>
           <a:lstStyle/>
           <a:p>
-            <a:r>
-              <a:rPr lang="en-US" dirty="0"/>
-              <a:t/>
-            </a:r>
             <a:endParaRPr lang="en-US" dirty="0"/>
           </a:p>
         </p:txBody>
@@ -768,10 +537,6 @@
           <a:bodyPr/>
           <a:lstStyle/>
           <a:p>
-            <a:r>
-              <a:rPr lang="en-US" dirty="0"/>
-              <a:t/>
-            </a:r>
             <a:endParaRPr lang="en-US" dirty="0"/>
           </a:p>
         </p:txBody>
@@ -856,10 +621,6 @@
           <a:bodyPr/>
           <a:lstStyle/>
           <a:p>
-            <a:r>
-              <a:rPr lang="en-US" dirty="0"/>
-              <a:t/>
-            </a:r>
             <a:endParaRPr lang="en-US" dirty="0"/>
           </a:p>
         </p:txBody>
@@ -933,6 +694,11 @@
 <file path=ppt/slideMasters/slideMaster1.xml><?xml version="1.0" encoding="utf-8"?>
 <p:sldMaster xmlns:a="http://schemas.openxmlformats.org/drawingml/2006/main" xmlns:r="http://schemas.openxmlformats.org/officeDocument/2006/relationships" xmlns:p="http://schemas.openxmlformats.org/presentationml/2006/main">
   <p:cSld>
+    <p:bg>
+      <p:bgRef idx="1001">
+        <a:schemeClr val="bg1"/>
+      </p:bgRef>
+    </p:bg>
     <p:spTree>
       <p:nvGrpSpPr>
         <p:cNvPr id="1" name=""/>
@@ -1213,7 +979,7 @@
     <p:bg>
       <p:bgPr>
         <a:blipFill dpi="0" rotWithShape="1">
-          <a:blip r:embed="rId1">
+          <a:blip r:embed="rId3">
             <a:lum/>
           </a:blip>
           <a:srcRect/>
@@ -1259,6 +1025,13 @@
           </a:solidFill>
           <a:ln/>
         </p:spPr>
+        <p:txBody>
+          <a:bodyPr/>
+          <a:lstStyle/>
+          <a:p>
+            <a:endParaRPr lang="ko-KR" altLang="en-US"/>
+          </a:p>
+        </p:txBody>
       </p:sp>
       <p:sp>
         <p:nvSpPr>
@@ -1281,11 +1054,11 @@
           <a:bodyPr wrap="square" lIns="0" tIns="0" rIns="0" bIns="0" rtlCol="0" anchor="ctr"/>
           <a:lstStyle/>
           <a:p>
-            <a:pPr algn="ctr" indent="0" marL="0">
-              <a:buNone/>
-            </a:pPr>
-            <a:r>
-              <a:rPr lang="en-US" sz="1050" b="1" spc="200" kern="0" dirty="0">
+            <a:pPr marL="0" indent="0" algn="ctr">
+              <a:buNone/>
+            </a:pPr>
+            <a:r>
+              <a:rPr lang="en-US" sz="1050" b="1" kern="0" spc="200" dirty="0">
                 <a:solidFill>
                   <a:srgbClr val="4A154B"/>
                 </a:solidFill>
@@ -1320,11 +1093,11 @@
           <a:bodyPr wrap="square" lIns="0" tIns="0" rIns="0" bIns="0" rtlCol="0" anchor="ctr"/>
           <a:lstStyle/>
           <a:p>
-            <a:pPr algn="l" indent="0" marL="0">
-              <a:buNone/>
-            </a:pPr>
-            <a:r>
-              <a:rPr lang="en-US" sz="6000" b="1" spc="-100" kern="0" dirty="0">
+            <a:pPr marL="0" indent="0" algn="l">
+              <a:buNone/>
+            </a:pPr>
+            <a:r>
+              <a:rPr lang="en-US" sz="6000" b="1" kern="0" spc="-100" dirty="0">
                 <a:solidFill>
                   <a:srgbClr val="4A154B"/>
                 </a:solidFill>
@@ -1332,7 +1105,18 @@
                 <a:ea typeface="Inter" pitchFamily="34" charset="-122"/>
                 <a:cs typeface="Inter" pitchFamily="34" charset="-120"/>
               </a:rPr>
-              <a:t>DaehoV2</a:t>
+              <a:t>213802 </a:t>
+            </a:r>
+            <a:r>
+              <a:rPr lang="ko-KR" altLang="en-US" sz="6000" b="1" kern="0" spc="-100" dirty="0">
+                <a:solidFill>
+                  <a:srgbClr val="4A154B"/>
+                </a:solidFill>
+                <a:latin typeface="Inter" pitchFamily="34" charset="0"/>
+                <a:ea typeface="Inter" pitchFamily="34" charset="-122"/>
+                <a:cs typeface="Inter" pitchFamily="34" charset="-120"/>
+              </a:rPr>
+              <a:t>최대한</a:t>
             </a:r>
             <a:endParaRPr lang="en-US" sz="6000" dirty="0"/>
           </a:p>
@@ -1359,7 +1143,7 @@
           <a:bodyPr wrap="square" lIns="0" tIns="0" rIns="0" bIns="0" rtlCol="0" anchor="ctr"/>
           <a:lstStyle/>
           <a:p>
-            <a:pPr algn="l" indent="0" marL="0">
+            <a:pPr marL="0" indent="0" algn="l">
               <a:buNone/>
             </a:pPr>
             <a:r>
@@ -1398,7 +1182,7 @@
           <a:bodyPr wrap="square" lIns="0" tIns="0" rIns="0" bIns="0" rtlCol="0" anchor="ctr"/>
           <a:lstStyle/>
           <a:p>
-            <a:pPr algn="l" indent="0" marL="0">
+            <a:pPr marL="0" indent="0" algn="l">
               <a:buNone/>
             </a:pPr>
             <a:r>
@@ -1437,6 +1221,13 @@
           </a:solidFill>
           <a:ln/>
         </p:spPr>
+        <p:txBody>
+          <a:bodyPr/>
+          <a:lstStyle/>
+          <a:p>
+            <a:endParaRPr lang="ko-KR" altLang="en-US"/>
+          </a:p>
+        </p:txBody>
       </p:sp>
       <p:sp>
         <p:nvSpPr>
@@ -1459,7 +1250,7 @@
           <a:bodyPr wrap="square" lIns="0" tIns="0" rIns="0" bIns="0" rtlCol="0" anchor="ctr"/>
           <a:lstStyle/>
           <a:p>
-            <a:pPr algn="ctr" indent="0" marL="0">
+            <a:pPr marL="0" indent="0" algn="ctr">
               <a:buNone/>
             </a:pPr>
             <a:r>
@@ -1498,6 +1289,13 @@
           </a:solidFill>
           <a:ln/>
         </p:spPr>
+        <p:txBody>
+          <a:bodyPr/>
+          <a:lstStyle/>
+          <a:p>
+            <a:endParaRPr lang="ko-KR" altLang="en-US"/>
+          </a:p>
+        </p:txBody>
       </p:sp>
       <p:sp>
         <p:nvSpPr>
@@ -1520,7 +1318,7 @@
           <a:bodyPr wrap="square" lIns="0" tIns="0" rIns="0" bIns="0" rtlCol="0" anchor="ctr"/>
           <a:lstStyle/>
           <a:p>
-            <a:pPr algn="ctr" indent="0" marL="0">
+            <a:pPr marL="0" indent="0" algn="ctr">
               <a:buNone/>
             </a:pPr>
             <a:r>
@@ -1559,6 +1357,13 @@
           </a:solidFill>
           <a:ln/>
         </p:spPr>
+        <p:txBody>
+          <a:bodyPr/>
+          <a:lstStyle/>
+          <a:p>
+            <a:endParaRPr lang="ko-KR" altLang="en-US"/>
+          </a:p>
+        </p:txBody>
       </p:sp>
       <p:sp>
         <p:nvSpPr>
@@ -1581,7 +1386,7 @@
           <a:bodyPr wrap="square" lIns="0" tIns="0" rIns="0" bIns="0" rtlCol="0" anchor="ctr"/>
           <a:lstStyle/>
           <a:p>
-            <a:pPr algn="ctr" indent="0" marL="0">
+            <a:pPr marL="0" indent="0" algn="ctr">
               <a:buNone/>
             </a:pPr>
             <a:r>
@@ -1615,6 +1420,7 @@
         <a:solidFill>
           <a:srgbClr val="FFFFFF"/>
         </a:solidFill>
+        <a:effectLst/>
       </p:bgPr>
     </p:bg>
     <p:spTree>
@@ -1652,6 +1458,13 @@
           </a:solidFill>
           <a:ln/>
         </p:spPr>
+        <p:txBody>
+          <a:bodyPr/>
+          <a:lstStyle/>
+          <a:p>
+            <a:endParaRPr lang="ko-KR" altLang="en-US"/>
+          </a:p>
+        </p:txBody>
       </p:sp>
       <p:sp>
         <p:nvSpPr>
@@ -1674,11 +1487,11 @@
           <a:bodyPr wrap="square" lIns="0" tIns="0" rIns="0" bIns="0" rtlCol="0" anchor="ctr"/>
           <a:lstStyle/>
           <a:p>
-            <a:pPr algn="ctr" indent="0" marL="0">
-              <a:buNone/>
-            </a:pPr>
-            <a:r>
-              <a:rPr lang="en-US" sz="1050" b="1" spc="200" kern="0" dirty="0">
+            <a:pPr marL="0" indent="0" algn="ctr">
+              <a:buNone/>
+            </a:pPr>
+            <a:r>
+              <a:rPr lang="en-US" sz="1050" b="1" kern="0" spc="200" dirty="0">
                 <a:solidFill>
                   <a:srgbClr val="4A154B"/>
                 </a:solidFill>
@@ -1713,11 +1526,11 @@
           <a:bodyPr wrap="square" lIns="0" tIns="0" rIns="0" bIns="0" rtlCol="0" anchor="ctr"/>
           <a:lstStyle/>
           <a:p>
-            <a:pPr algn="l" indent="0" marL="0">
-              <a:buNone/>
-            </a:pPr>
-            <a:r>
-              <a:rPr lang="en-US" sz="2800" b="1" spc="-40" kern="0" dirty="0">
+            <a:pPr marL="0" indent="0" algn="l">
+              <a:buNone/>
+            </a:pPr>
+            <a:r>
+              <a:rPr lang="en-US" sz="2800" b="1" kern="0" spc="-40" dirty="0">
                 <a:solidFill>
                   <a:srgbClr val="4A154B"/>
                 </a:solidFill>
@@ -1752,7 +1565,7 @@
           <a:bodyPr wrap="square" lIns="0" tIns="0" rIns="0" bIns="0" rtlCol="0" anchor="ctr"/>
           <a:lstStyle/>
           <a:p>
-            <a:pPr algn="l" indent="0" marL="0">
+            <a:pPr marL="0" indent="0" algn="l">
               <a:buNone/>
             </a:pPr>
             <a:r>
@@ -1791,13 +1604,20 @@
           </a:solidFill>
           <a:ln/>
           <a:effectLst>
-            <a:outerShdw sx="100000" sy="100000" kx="0" ky="0" algn="bl" rotWithShape="0" blurRad="139700" dist="38100" dir="5400000">
+            <a:outerShdw blurRad="139700" dist="38100" dir="5400000" algn="bl" rotWithShape="0">
               <a:srgbClr val="000000">
                 <a:alpha val="10000"/>
               </a:srgbClr>
             </a:outerShdw>
           </a:effectLst>
         </p:spPr>
+        <p:txBody>
+          <a:bodyPr/>
+          <a:lstStyle/>
+          <a:p>
+            <a:endParaRPr lang="ko-KR" altLang="en-US"/>
+          </a:p>
+        </p:txBody>
       </p:sp>
       <p:sp>
         <p:nvSpPr>
@@ -1820,7 +1640,7 @@
           <a:bodyPr wrap="square" lIns="0" tIns="0" rIns="0" bIns="0" rtlCol="0" anchor="ctr"/>
           <a:lstStyle/>
           <a:p>
-            <a:pPr indent="0" marL="0">
+            <a:pPr marL="0" indent="0">
               <a:buNone/>
             </a:pPr>
             <a:r>
@@ -1859,7 +1679,7 @@
           <a:bodyPr wrap="square" lIns="0" tIns="0" rIns="0" bIns="0" rtlCol="0" anchor="ctr"/>
           <a:lstStyle/>
           <a:p>
-            <a:pPr indent="0" marL="0">
+            <a:pPr marL="0" indent="0">
               <a:lnSpc>
                 <a:spcPct val="115000"/>
               </a:lnSpc>
@@ -1879,7 +1699,7 @@
             <a:endParaRPr lang="en-US" sz="1350" dirty="0"/>
           </a:p>
           <a:p>
-            <a:pPr indent="0" marL="0">
+            <a:pPr marL="0" indent="0">
               <a:lnSpc>
                 <a:spcPct val="115000"/>
               </a:lnSpc>
@@ -1899,7 +1719,7 @@
             <a:endParaRPr lang="en-US" sz="1350" dirty="0"/>
           </a:p>
           <a:p>
-            <a:pPr indent="0" marL="0">
+            <a:pPr marL="0" indent="0">
               <a:lnSpc>
                 <a:spcPct val="115000"/>
               </a:lnSpc>
@@ -1919,7 +1739,7 @@
             <a:endParaRPr lang="en-US" sz="1350" dirty="0"/>
           </a:p>
           <a:p>
-            <a:pPr indent="0" marL="0">
+            <a:pPr marL="0" indent="0">
               <a:lnSpc>
                 <a:spcPct val="115000"/>
               </a:lnSpc>
@@ -1961,7 +1781,7 @@
           <a:bodyPr wrap="square" lIns="0" tIns="0" rIns="0" bIns="0" rtlCol="0" anchor="t"/>
           <a:lstStyle/>
           <a:p>
-            <a:pPr indent="0" marL="0">
+            <a:pPr marL="0" indent="0">
               <a:lnSpc>
                 <a:spcPct val="115000"/>
               </a:lnSpc>
@@ -2004,6 +1824,13 @@
             <a:prstDash val="solid"/>
           </a:ln>
         </p:spPr>
+        <p:txBody>
+          <a:bodyPr/>
+          <a:lstStyle/>
+          <a:p>
+            <a:endParaRPr lang="ko-KR" altLang="en-US"/>
+          </a:p>
+        </p:txBody>
       </p:sp>
       <p:sp>
         <p:nvSpPr>
@@ -2024,6 +1851,13 @@
           </a:solidFill>
           <a:ln/>
         </p:spPr>
+        <p:txBody>
+          <a:bodyPr/>
+          <a:lstStyle/>
+          <a:p>
+            <a:endParaRPr lang="ko-KR" altLang="en-US"/>
+          </a:p>
+        </p:txBody>
       </p:sp>
       <p:sp>
         <p:nvSpPr>
@@ -2046,7 +1880,7 @@
           <a:bodyPr wrap="square" lIns="0" tIns="0" rIns="0" bIns="0" rtlCol="0" anchor="ctr"/>
           <a:lstStyle/>
           <a:p>
-            <a:pPr algn="ctr" indent="0" marL="0">
+            <a:pPr marL="0" indent="0" algn="ctr">
               <a:buNone/>
             </a:pPr>
             <a:r>
@@ -2085,7 +1919,7 @@
           <a:bodyPr wrap="square" lIns="0" tIns="0" rIns="0" bIns="0" rtlCol="0" anchor="t"/>
           <a:lstStyle/>
           <a:p>
-            <a:pPr indent="0" marL="0">
+            <a:pPr marL="0" indent="0">
               <a:lnSpc>
                 <a:spcPct val="105000"/>
               </a:lnSpc>
@@ -2105,7 +1939,7 @@
             <a:endParaRPr lang="en-US" sz="1350" dirty="0"/>
           </a:p>
           <a:p>
-            <a:pPr indent="0" marL="0">
+            <a:pPr marL="0" indent="0">
               <a:lnSpc>
                 <a:spcPct val="105000"/>
               </a:lnSpc>
@@ -2145,6 +1979,13 @@
           </a:solidFill>
           <a:ln/>
         </p:spPr>
+        <p:txBody>
+          <a:bodyPr/>
+          <a:lstStyle/>
+          <a:p>
+            <a:endParaRPr lang="ko-KR" altLang="en-US"/>
+          </a:p>
+        </p:txBody>
       </p:sp>
       <p:sp>
         <p:nvSpPr>
@@ -2167,7 +2008,7 @@
           <a:bodyPr wrap="square" lIns="0" tIns="0" rIns="0" bIns="0" rtlCol="0" anchor="ctr"/>
           <a:lstStyle/>
           <a:p>
-            <a:pPr algn="ctr" indent="0" marL="0">
+            <a:pPr marL="0" indent="0" algn="ctr">
               <a:buNone/>
             </a:pPr>
             <a:r>
@@ -2206,7 +2047,7 @@
           <a:bodyPr wrap="square" lIns="0" tIns="0" rIns="0" bIns="0" rtlCol="0" anchor="t"/>
           <a:lstStyle/>
           <a:p>
-            <a:pPr indent="0" marL="0">
+            <a:pPr marL="0" indent="0">
               <a:lnSpc>
                 <a:spcPct val="105000"/>
               </a:lnSpc>
@@ -2226,7 +2067,7 @@
             <a:endParaRPr lang="en-US" sz="1350" dirty="0"/>
           </a:p>
           <a:p>
-            <a:pPr indent="0" marL="0">
+            <a:pPr marL="0" indent="0">
               <a:lnSpc>
                 <a:spcPct val="105000"/>
               </a:lnSpc>
@@ -2266,6 +2107,13 @@
           </a:solidFill>
           <a:ln/>
         </p:spPr>
+        <p:txBody>
+          <a:bodyPr/>
+          <a:lstStyle/>
+          <a:p>
+            <a:endParaRPr lang="ko-KR" altLang="en-US"/>
+          </a:p>
+        </p:txBody>
       </p:sp>
       <p:sp>
         <p:nvSpPr>
@@ -2288,7 +2136,7 @@
           <a:bodyPr wrap="square" lIns="0" tIns="0" rIns="0" bIns="0" rtlCol="0" anchor="ctr"/>
           <a:lstStyle/>
           <a:p>
-            <a:pPr algn="ctr" indent="0" marL="0">
+            <a:pPr marL="0" indent="0" algn="ctr">
               <a:buNone/>
             </a:pPr>
             <a:r>
@@ -2327,7 +2175,7 @@
           <a:bodyPr wrap="square" lIns="0" tIns="0" rIns="0" bIns="0" rtlCol="0" anchor="t"/>
           <a:lstStyle/>
           <a:p>
-            <a:pPr indent="0" marL="0">
+            <a:pPr marL="0" indent="0">
               <a:lnSpc>
                 <a:spcPct val="105000"/>
               </a:lnSpc>
@@ -2347,7 +2195,7 @@
             <a:endParaRPr lang="en-US" sz="1350" dirty="0"/>
           </a:p>
           <a:p>
-            <a:pPr indent="0" marL="0">
+            <a:pPr marL="0" indent="0">
               <a:lnSpc>
                 <a:spcPct val="105000"/>
               </a:lnSpc>
@@ -2387,6 +2235,13 @@
           </a:solidFill>
           <a:ln/>
         </p:spPr>
+        <p:txBody>
+          <a:bodyPr/>
+          <a:lstStyle/>
+          <a:p>
+            <a:endParaRPr lang="ko-KR" altLang="en-US"/>
+          </a:p>
+        </p:txBody>
       </p:sp>
       <p:sp>
         <p:nvSpPr>
@@ -2409,7 +2264,7 @@
           <a:bodyPr wrap="square" lIns="0" tIns="0" rIns="0" bIns="0" rtlCol="0" anchor="ctr"/>
           <a:lstStyle/>
           <a:p>
-            <a:pPr algn="ctr" indent="0" marL="0">
+            <a:pPr marL="0" indent="0" algn="ctr">
               <a:buNone/>
             </a:pPr>
             <a:r>
@@ -2448,7 +2303,7 @@
           <a:bodyPr wrap="square" lIns="0" tIns="0" rIns="0" bIns="0" rtlCol="0" anchor="t"/>
           <a:lstStyle/>
           <a:p>
-            <a:pPr indent="0" marL="0">
+            <a:pPr marL="0" indent="0">
               <a:lnSpc>
                 <a:spcPct val="105000"/>
               </a:lnSpc>
@@ -2468,7 +2323,7 @@
             <a:endParaRPr lang="en-US" sz="1350" dirty="0"/>
           </a:p>
           <a:p>
-            <a:pPr indent="0" marL="0">
+            <a:pPr marL="0" indent="0">
               <a:lnSpc>
                 <a:spcPct val="105000"/>
               </a:lnSpc>
@@ -2505,6 +2360,7 @@
         <a:solidFill>
           <a:srgbClr val="FFFFFF"/>
         </a:solidFill>
+        <a:effectLst/>
       </p:bgPr>
     </p:bg>
     <p:spTree>
@@ -2542,6 +2398,13 @@
           </a:solidFill>
           <a:ln/>
         </p:spPr>
+        <p:txBody>
+          <a:bodyPr/>
+          <a:lstStyle/>
+          <a:p>
+            <a:endParaRPr lang="ko-KR" altLang="en-US"/>
+          </a:p>
+        </p:txBody>
       </p:sp>
       <p:sp>
         <p:nvSpPr>
@@ -2564,11 +2427,11 @@
           <a:bodyPr wrap="square" lIns="0" tIns="0" rIns="0" bIns="0" rtlCol="0" anchor="ctr"/>
           <a:lstStyle/>
           <a:p>
-            <a:pPr algn="ctr" indent="0" marL="0">
-              <a:buNone/>
-            </a:pPr>
-            <a:r>
-              <a:rPr lang="en-US" sz="1050" b="1" spc="200" kern="0" dirty="0">
+            <a:pPr marL="0" indent="0" algn="ctr">
+              <a:buNone/>
+            </a:pPr>
+            <a:r>
+              <a:rPr lang="en-US" sz="1050" b="1" kern="0" spc="200" dirty="0">
                 <a:solidFill>
                   <a:srgbClr val="4A154B"/>
                 </a:solidFill>
@@ -2603,11 +2466,11 @@
           <a:bodyPr wrap="square" lIns="0" tIns="0" rIns="0" bIns="0" rtlCol="0" anchor="ctr"/>
           <a:lstStyle/>
           <a:p>
-            <a:pPr algn="l" indent="0" marL="0">
-              <a:buNone/>
-            </a:pPr>
-            <a:r>
-              <a:rPr lang="en-US" sz="2800" b="1" spc="-40" kern="0" dirty="0">
+            <a:pPr marL="0" indent="0" algn="l">
+              <a:buNone/>
+            </a:pPr>
+            <a:r>
+              <a:rPr lang="en-US" sz="2800" b="1" kern="0" spc="-40" dirty="0">
                 <a:solidFill>
                   <a:srgbClr val="4A154B"/>
                 </a:solidFill>
@@ -2642,7 +2505,7 @@
           <a:bodyPr wrap="square" lIns="0" tIns="0" rIns="0" bIns="0" rtlCol="0" anchor="ctr"/>
           <a:lstStyle/>
           <a:p>
-            <a:pPr algn="l" indent="0" marL="0">
+            <a:pPr marL="0" indent="0" algn="l">
               <a:buNone/>
             </a:pPr>
             <a:r>
@@ -2686,6 +2549,13 @@
             <a:prstDash val="solid"/>
           </a:ln>
         </p:spPr>
+        <p:txBody>
+          <a:bodyPr/>
+          <a:lstStyle/>
+          <a:p>
+            <a:endParaRPr lang="ko-KR" altLang="en-US"/>
+          </a:p>
+        </p:txBody>
       </p:sp>
       <p:sp>
         <p:nvSpPr>
@@ -2708,14 +2578,14 @@
           <a:bodyPr wrap="square" lIns="0" tIns="0" rIns="0" bIns="0" rtlCol="0" anchor="ctr"/>
           <a:lstStyle/>
           <a:p>
-            <a:pPr algn="ctr" indent="0" marL="0">
+            <a:pPr marL="0" indent="0" algn="ctr">
               <a:lnSpc>
                 <a:spcPct val="110000"/>
               </a:lnSpc>
               <a:buNone/>
             </a:pPr>
             <a:r>
-              <a:rPr lang="en-US" sz="1200" b="1" spc="50" kern="0" dirty="0">
+              <a:rPr lang="en-US" sz="1200" b="1" kern="0" spc="50" dirty="0">
                 <a:solidFill>
                   <a:srgbClr val="4A154B"/>
                 </a:solidFill>
@@ -2728,7 +2598,7 @@
             <a:endParaRPr lang="en-US" sz="1200" dirty="0"/>
           </a:p>
           <a:p>
-            <a:pPr algn="ctr" indent="0" marL="0">
+            <a:pPr marL="0" indent="0" algn="ctr">
               <a:lnSpc>
                 <a:spcPct val="110000"/>
               </a:lnSpc>
@@ -2770,7 +2640,7 @@
           <a:bodyPr wrap="square" lIns="0" tIns="0" rIns="0" bIns="0" rtlCol="0" anchor="ctr"/>
           <a:lstStyle/>
           <a:p>
-            <a:pPr algn="ctr" indent="0" marL="0">
+            <a:pPr marL="0" indent="0" algn="ctr">
               <a:buNone/>
             </a:pPr>
             <a:r>
@@ -2814,6 +2684,13 @@
             <a:prstDash val="solid"/>
           </a:ln>
         </p:spPr>
+        <p:txBody>
+          <a:bodyPr/>
+          <a:lstStyle/>
+          <a:p>
+            <a:endParaRPr lang="ko-KR" altLang="en-US"/>
+          </a:p>
+        </p:txBody>
       </p:sp>
       <p:sp>
         <p:nvSpPr>
@@ -2836,14 +2713,14 @@
           <a:bodyPr wrap="square" lIns="0" tIns="0" rIns="0" bIns="0" rtlCol="0" anchor="ctr"/>
           <a:lstStyle/>
           <a:p>
-            <a:pPr algn="ctr" indent="0" marL="0">
+            <a:pPr marL="0" indent="0" algn="ctr">
               <a:lnSpc>
                 <a:spcPct val="110000"/>
               </a:lnSpc>
               <a:buNone/>
             </a:pPr>
             <a:r>
-              <a:rPr lang="en-US" sz="1200" b="1" spc="50" kern="0" dirty="0">
+              <a:rPr lang="en-US" sz="1200" b="1" kern="0" spc="50" dirty="0">
                 <a:solidFill>
                   <a:srgbClr val="4A154B"/>
                 </a:solidFill>
@@ -2856,7 +2733,7 @@
             <a:endParaRPr lang="en-US" sz="1200" dirty="0"/>
           </a:p>
           <a:p>
-            <a:pPr algn="ctr" indent="0" marL="0">
+            <a:pPr marL="0" indent="0" algn="ctr">
               <a:lnSpc>
                 <a:spcPct val="110000"/>
               </a:lnSpc>
@@ -2898,7 +2775,7 @@
           <a:bodyPr wrap="square" lIns="0" tIns="0" rIns="0" bIns="0" rtlCol="0" anchor="ctr"/>
           <a:lstStyle/>
           <a:p>
-            <a:pPr algn="ctr" indent="0" marL="0">
+            <a:pPr marL="0" indent="0" algn="ctr">
               <a:buNone/>
             </a:pPr>
             <a:r>
@@ -2942,6 +2819,13 @@
             <a:prstDash val="solid"/>
           </a:ln>
         </p:spPr>
+        <p:txBody>
+          <a:bodyPr/>
+          <a:lstStyle/>
+          <a:p>
+            <a:endParaRPr lang="ko-KR" altLang="en-US"/>
+          </a:p>
+        </p:txBody>
       </p:sp>
       <p:sp>
         <p:nvSpPr>
@@ -2964,14 +2848,14 @@
           <a:bodyPr wrap="square" lIns="0" tIns="0" rIns="0" bIns="0" rtlCol="0" anchor="ctr"/>
           <a:lstStyle/>
           <a:p>
-            <a:pPr algn="ctr" indent="0" marL="0">
+            <a:pPr marL="0" indent="0" algn="ctr">
               <a:lnSpc>
                 <a:spcPct val="110000"/>
               </a:lnSpc>
               <a:buNone/>
             </a:pPr>
             <a:r>
-              <a:rPr lang="en-US" sz="1200" b="1" spc="50" kern="0" dirty="0">
+              <a:rPr lang="en-US" sz="1200" b="1" kern="0" spc="50" dirty="0">
                 <a:solidFill>
                   <a:srgbClr val="4A154B"/>
                 </a:solidFill>
@@ -2984,7 +2868,7 @@
             <a:endParaRPr lang="en-US" sz="1200" dirty="0"/>
           </a:p>
           <a:p>
-            <a:pPr algn="ctr" indent="0" marL="0">
+            <a:pPr marL="0" indent="0" algn="ctr">
               <a:lnSpc>
                 <a:spcPct val="110000"/>
               </a:lnSpc>
@@ -3026,7 +2910,7 @@
           <a:bodyPr wrap="square" lIns="0" tIns="0" rIns="0" bIns="0" rtlCol="0" anchor="ctr"/>
           <a:lstStyle/>
           <a:p>
-            <a:pPr algn="ctr" indent="0" marL="0">
+            <a:pPr marL="0" indent="0" algn="ctr">
               <a:buNone/>
             </a:pPr>
             <a:r>
@@ -3070,6 +2954,13 @@
             <a:prstDash val="solid"/>
           </a:ln>
         </p:spPr>
+        <p:txBody>
+          <a:bodyPr/>
+          <a:lstStyle/>
+          <a:p>
+            <a:endParaRPr lang="ko-KR" altLang="en-US"/>
+          </a:p>
+        </p:txBody>
       </p:sp>
       <p:sp>
         <p:nvSpPr>
@@ -3092,14 +2983,14 @@
           <a:bodyPr wrap="square" lIns="0" tIns="0" rIns="0" bIns="0" rtlCol="0" anchor="ctr"/>
           <a:lstStyle/>
           <a:p>
-            <a:pPr algn="ctr" indent="0" marL="0">
+            <a:pPr marL="0" indent="0" algn="ctr">
               <a:lnSpc>
                 <a:spcPct val="110000"/>
               </a:lnSpc>
               <a:buNone/>
             </a:pPr>
             <a:r>
-              <a:rPr lang="en-US" sz="1200" b="1" spc="50" kern="0" dirty="0">
+              <a:rPr lang="en-US" sz="1200" b="1" kern="0" spc="50" dirty="0">
                 <a:solidFill>
                   <a:srgbClr val="4A154B"/>
                 </a:solidFill>
@@ -3112,7 +3003,7 @@
             <a:endParaRPr lang="en-US" sz="1200" dirty="0"/>
           </a:p>
           <a:p>
-            <a:pPr algn="ctr" indent="0" marL="0">
+            <a:pPr marL="0" indent="0" algn="ctr">
               <a:lnSpc>
                 <a:spcPct val="110000"/>
               </a:lnSpc>
@@ -3154,7 +3045,7 @@
           <a:bodyPr wrap="square" lIns="0" tIns="0" rIns="0" bIns="0" rtlCol="0" anchor="ctr"/>
           <a:lstStyle/>
           <a:p>
-            <a:pPr indent="0" marL="0">
+            <a:pPr marL="0" indent="0">
               <a:buNone/>
             </a:pPr>
             <a:r>
@@ -3193,13 +3084,20 @@
           </a:solidFill>
           <a:ln/>
           <a:effectLst>
-            <a:outerShdw sx="100000" sy="100000" kx="0" ky="0" algn="bl" rotWithShape="0" blurRad="139700" dist="38100" dir="5400000">
+            <a:outerShdw blurRad="139700" dist="38100" dir="5400000" algn="bl" rotWithShape="0">
               <a:srgbClr val="000000">
                 <a:alpha val="10000"/>
               </a:srgbClr>
             </a:outerShdw>
           </a:effectLst>
         </p:spPr>
+        <p:txBody>
+          <a:bodyPr/>
+          <a:lstStyle/>
+          <a:p>
+            <a:endParaRPr lang="ko-KR" altLang="en-US"/>
+          </a:p>
+        </p:txBody>
       </p:sp>
       <p:sp>
         <p:nvSpPr>
@@ -3222,7 +3120,7 @@
           <a:bodyPr wrap="square" lIns="0" tIns="0" rIns="0" bIns="0" rtlCol="0" anchor="ctr"/>
           <a:lstStyle/>
           <a:p>
-            <a:pPr indent="0" marL="0">
+            <a:pPr marL="0" indent="0">
               <a:buNone/>
             </a:pPr>
             <a:r>
@@ -3261,7 +3159,7 @@
           <a:bodyPr wrap="square" lIns="0" tIns="0" rIns="0" bIns="0" rtlCol="0" anchor="ctr"/>
           <a:lstStyle/>
           <a:p>
-            <a:pPr indent="0" marL="0">
+            <a:pPr marL="0" indent="0">
               <a:buNone/>
             </a:pPr>
             <a:r>
@@ -3275,9 +3173,6 @@
               </a:rPr>
               <a:t>1.07·피해합  </a:t>
             </a:r>
-            <a:pPr indent="0" marL="0">
-              <a:buNone/>
-            </a:pPr>
             <a:r>
               <a:rPr lang="en-US" sz="1650" dirty="0">
                 <a:solidFill>
@@ -3289,9 +3184,6 @@
               </a:rPr>
               <a:t>+ 0.30·내구  + 0.55·속도  </a:t>
             </a:r>
-            <a:pPr indent="0" marL="0">
-              <a:buNone/>
-            </a:pPr>
             <a:r>
               <a:rPr lang="en-US" sz="1650" b="1" dirty="0">
                 <a:solidFill>
@@ -3303,9 +3195,6 @@
               </a:rPr>
               <a:t>− 0.50·방어패널티</a:t>
             </a:r>
-            <a:pPr indent="0" marL="0">
-              <a:buNone/>
-            </a:pPr>
             <a:r>
               <a:rPr lang="en-US" sz="1650" dirty="0">
                 <a:solidFill>
@@ -3315,7 +3204,7 @@
                 <a:ea typeface="Inter" pitchFamily="34" charset="-122"/>
                 <a:cs typeface="Inter" pitchFamily="34" charset="-120"/>
               </a:rPr>
-              <a:t> (P21)</a:t>
+              <a:t> </a:t>
             </a:r>
             <a:endParaRPr lang="en-US" sz="1650" dirty="0"/>
           </a:p>
@@ -3342,7 +3231,7 @@
           <a:bodyPr wrap="square" lIns="0" tIns="0" rIns="0" bIns="0" rtlCol="0" anchor="ctr"/>
           <a:lstStyle/>
           <a:p>
-            <a:pPr indent="0" marL="0">
+            <a:pPr marL="0" indent="0">
               <a:buNone/>
             </a:pPr>
             <a:r>
@@ -3376,6 +3265,7 @@
         <a:solidFill>
           <a:srgbClr val="FFFFFF"/>
         </a:solidFill>
+        <a:effectLst/>
       </p:bgPr>
     </p:bg>
     <p:spTree>
@@ -3413,6 +3303,13 @@
           </a:solidFill>
           <a:ln/>
         </p:spPr>
+        <p:txBody>
+          <a:bodyPr/>
+          <a:lstStyle/>
+          <a:p>
+            <a:endParaRPr lang="ko-KR" altLang="en-US"/>
+          </a:p>
+        </p:txBody>
       </p:sp>
       <p:sp>
         <p:nvSpPr>
@@ -3435,11 +3332,11 @@
           <a:bodyPr wrap="square" lIns="0" tIns="0" rIns="0" bIns="0" rtlCol="0" anchor="ctr"/>
           <a:lstStyle/>
           <a:p>
-            <a:pPr algn="ctr" indent="0" marL="0">
-              <a:buNone/>
-            </a:pPr>
-            <a:r>
-              <a:rPr lang="en-US" sz="1050" b="1" spc="200" kern="0" dirty="0">
+            <a:pPr marL="0" indent="0" algn="ctr">
+              <a:buNone/>
+            </a:pPr>
+            <a:r>
+              <a:rPr lang="en-US" sz="1050" b="1" kern="0" spc="200" dirty="0">
                 <a:solidFill>
                   <a:srgbClr val="4A154B"/>
                 </a:solidFill>
@@ -3474,11 +3371,11 @@
           <a:bodyPr wrap="square" lIns="0" tIns="0" rIns="0" bIns="0" rtlCol="0" anchor="ctr"/>
           <a:lstStyle/>
           <a:p>
-            <a:pPr algn="l" indent="0" marL="0">
-              <a:buNone/>
-            </a:pPr>
-            <a:r>
-              <a:rPr lang="en-US" sz="2800" b="1" spc="-40" kern="0" dirty="0">
+            <a:pPr marL="0" indent="0" algn="l">
+              <a:buNone/>
+            </a:pPr>
+            <a:r>
+              <a:rPr lang="en-US" sz="2800" b="1" kern="0" spc="-40" dirty="0">
                 <a:solidFill>
                   <a:srgbClr val="4A154B"/>
                 </a:solidFill>
@@ -3513,7 +3410,7 @@
           <a:bodyPr wrap="square" lIns="0" tIns="0" rIns="0" bIns="0" rtlCol="0" anchor="ctr"/>
           <a:lstStyle/>
           <a:p>
-            <a:pPr algn="l" indent="0" marL="0">
+            <a:pPr marL="0" indent="0" algn="l">
               <a:buNone/>
             </a:pPr>
             <a:r>
@@ -3553,6 +3450,13 @@
             <a:prstDash val="solid"/>
           </a:ln>
         </p:spPr>
+        <p:txBody>
+          <a:bodyPr/>
+          <a:lstStyle/>
+          <a:p>
+            <a:endParaRPr lang="ko-KR" altLang="en-US"/>
+          </a:p>
+        </p:txBody>
       </p:sp>
       <p:sp>
         <p:nvSpPr>
@@ -3573,6 +3477,13 @@
           </a:solidFill>
           <a:ln/>
         </p:spPr>
+        <p:txBody>
+          <a:bodyPr/>
+          <a:lstStyle/>
+          <a:p>
+            <a:endParaRPr lang="ko-KR" altLang="en-US"/>
+          </a:p>
+        </p:txBody>
       </p:sp>
       <p:sp>
         <p:nvSpPr>
@@ -3595,7 +3506,7 @@
           <a:bodyPr wrap="square" lIns="0" tIns="0" rIns="0" bIns="0" rtlCol="0" anchor="ctr"/>
           <a:lstStyle/>
           <a:p>
-            <a:pPr algn="ctr" indent="0" marL="0">
+            <a:pPr marL="0" indent="0" algn="ctr">
               <a:buNone/>
             </a:pPr>
             <a:r>
@@ -3634,7 +3545,7 @@
           <a:bodyPr wrap="square" lIns="0" tIns="0" rIns="0" bIns="0" rtlCol="0" anchor="t"/>
           <a:lstStyle/>
           <a:p>
-            <a:pPr indent="0" marL="0">
+            <a:pPr marL="0" indent="0">
               <a:lnSpc>
                 <a:spcPct val="105000"/>
               </a:lnSpc>
@@ -3654,7 +3565,7 @@
             <a:endParaRPr lang="en-US" sz="1350" dirty="0"/>
           </a:p>
           <a:p>
-            <a:pPr indent="0" marL="0">
+            <a:pPr marL="0" indent="0">
               <a:lnSpc>
                 <a:spcPct val="105000"/>
               </a:lnSpc>
@@ -3694,6 +3605,13 @@
           </a:solidFill>
           <a:ln/>
         </p:spPr>
+        <p:txBody>
+          <a:bodyPr/>
+          <a:lstStyle/>
+          <a:p>
+            <a:endParaRPr lang="ko-KR" altLang="en-US"/>
+          </a:p>
+        </p:txBody>
       </p:sp>
       <p:sp>
         <p:nvSpPr>
@@ -3716,7 +3634,7 @@
           <a:bodyPr wrap="square" lIns="0" tIns="0" rIns="0" bIns="0" rtlCol="0" anchor="ctr"/>
           <a:lstStyle/>
           <a:p>
-            <a:pPr algn="ctr" indent="0" marL="0">
+            <a:pPr marL="0" indent="0" algn="ctr">
               <a:buNone/>
             </a:pPr>
             <a:r>
@@ -3755,7 +3673,7 @@
           <a:bodyPr wrap="square" lIns="0" tIns="0" rIns="0" bIns="0" rtlCol="0" anchor="t"/>
           <a:lstStyle/>
           <a:p>
-            <a:pPr indent="0" marL="0">
+            <a:pPr marL="0" indent="0">
               <a:lnSpc>
                 <a:spcPct val="105000"/>
               </a:lnSpc>
@@ -3775,7 +3693,7 @@
             <a:endParaRPr lang="en-US" sz="1350" dirty="0"/>
           </a:p>
           <a:p>
-            <a:pPr indent="0" marL="0">
+            <a:pPr marL="0" indent="0">
               <a:lnSpc>
                 <a:spcPct val="105000"/>
               </a:lnSpc>
@@ -3815,6 +3733,13 @@
           </a:solidFill>
           <a:ln/>
         </p:spPr>
+        <p:txBody>
+          <a:bodyPr/>
+          <a:lstStyle/>
+          <a:p>
+            <a:endParaRPr lang="ko-KR" altLang="en-US"/>
+          </a:p>
+        </p:txBody>
       </p:sp>
       <p:sp>
         <p:nvSpPr>
@@ -3837,7 +3762,7 @@
           <a:bodyPr wrap="square" lIns="0" tIns="0" rIns="0" bIns="0" rtlCol="0" anchor="ctr"/>
           <a:lstStyle/>
           <a:p>
-            <a:pPr algn="ctr" indent="0" marL="0">
+            <a:pPr marL="0" indent="0" algn="ctr">
               <a:buNone/>
             </a:pPr>
             <a:r>
@@ -3876,7 +3801,7 @@
           <a:bodyPr wrap="square" lIns="0" tIns="0" rIns="0" bIns="0" rtlCol="0" anchor="t"/>
           <a:lstStyle/>
           <a:p>
-            <a:pPr indent="0" marL="0">
+            <a:pPr marL="0" indent="0">
               <a:lnSpc>
                 <a:spcPct val="105000"/>
               </a:lnSpc>
@@ -3896,7 +3821,7 @@
             <a:endParaRPr lang="en-US" sz="1350" dirty="0"/>
           </a:p>
           <a:p>
-            <a:pPr indent="0" marL="0">
+            <a:pPr marL="0" indent="0">
               <a:lnSpc>
                 <a:spcPct val="105000"/>
               </a:lnSpc>
@@ -3936,6 +3861,13 @@
           </a:solidFill>
           <a:ln/>
         </p:spPr>
+        <p:txBody>
+          <a:bodyPr/>
+          <a:lstStyle/>
+          <a:p>
+            <a:endParaRPr lang="ko-KR" altLang="en-US"/>
+          </a:p>
+        </p:txBody>
       </p:sp>
       <p:sp>
         <p:nvSpPr>
@@ -3958,7 +3890,7 @@
           <a:bodyPr wrap="square" lIns="0" tIns="0" rIns="0" bIns="0" rtlCol="0" anchor="ctr"/>
           <a:lstStyle/>
           <a:p>
-            <a:pPr algn="ctr" indent="0" marL="0">
+            <a:pPr marL="0" indent="0" algn="ctr">
               <a:buNone/>
             </a:pPr>
             <a:r>
@@ -3997,7 +3929,7 @@
           <a:bodyPr wrap="square" lIns="0" tIns="0" rIns="0" bIns="0" rtlCol="0" anchor="t"/>
           <a:lstStyle/>
           <a:p>
-            <a:pPr indent="0" marL="0">
+            <a:pPr marL="0" indent="0">
               <a:lnSpc>
                 <a:spcPct val="105000"/>
               </a:lnSpc>
@@ -4017,7 +3949,7 @@
             <a:endParaRPr lang="en-US" sz="1350" dirty="0"/>
           </a:p>
           <a:p>
-            <a:pPr indent="0" marL="0">
+            <a:pPr marL="0" indent="0">
               <a:lnSpc>
                 <a:spcPct val="105000"/>
               </a:lnSpc>
@@ -4059,13 +3991,20 @@
           </a:solidFill>
           <a:ln/>
           <a:effectLst>
-            <a:outerShdw sx="100000" sy="100000" kx="0" ky="0" algn="bl" rotWithShape="0" blurRad="139700" dist="38100" dir="5400000">
+            <a:outerShdw blurRad="139700" dist="38100" dir="5400000" algn="bl" rotWithShape="0">
               <a:srgbClr val="000000">
                 <a:alpha val="10000"/>
               </a:srgbClr>
             </a:outerShdw>
           </a:effectLst>
         </p:spPr>
+        <p:txBody>
+          <a:bodyPr/>
+          <a:lstStyle/>
+          <a:p>
+            <a:endParaRPr lang="ko-KR" altLang="en-US"/>
+          </a:p>
+        </p:txBody>
       </p:sp>
       <p:sp>
         <p:nvSpPr>
@@ -4088,7 +4027,7 @@
           <a:bodyPr wrap="square" lIns="0" tIns="0" rIns="0" bIns="0" rtlCol="0" anchor="ctr"/>
           <a:lstStyle/>
           <a:p>
-            <a:pPr indent="0" marL="0">
+            <a:pPr marL="0" indent="0">
               <a:buNone/>
             </a:pPr>
             <a:r>
@@ -4206,7 +4145,7 @@
                 <a:ea typeface="Inter" pitchFamily="34" charset="-122"/>
                 <a:cs typeface="Inter" pitchFamily="34" charset="-120"/>
               </a:rPr>
-              <a:t>즉시 KO 가능 후보 +15,000 (P7)</a:t>
+              <a:t>즉시 KO 가능 후보 +15,000</a:t>
             </a:r>
             <a:endParaRPr lang="en-US" sz="1200" dirty="0"/>
           </a:p>
@@ -4233,7 +4172,7 @@
           <a:bodyPr wrap="square" lIns="0" tIns="0" rIns="0" bIns="0" rtlCol="0" anchor="t"/>
           <a:lstStyle/>
           <a:p>
-            <a:pPr indent="0" marL="0">
+            <a:pPr marL="0" indent="0">
               <a:lnSpc>
                 <a:spcPct val="110000"/>
               </a:lnSpc>
@@ -4270,6 +4209,7 @@
         <a:solidFill>
           <a:srgbClr val="FFFFFF"/>
         </a:solidFill>
+        <a:effectLst/>
       </p:bgPr>
     </p:bg>
     <p:spTree>
@@ -4307,6 +4247,13 @@
           </a:solidFill>
           <a:ln/>
         </p:spPr>
+        <p:txBody>
+          <a:bodyPr/>
+          <a:lstStyle/>
+          <a:p>
+            <a:endParaRPr lang="ko-KR" altLang="en-US"/>
+          </a:p>
+        </p:txBody>
       </p:sp>
       <p:sp>
         <p:nvSpPr>
@@ -4329,11 +4276,11 @@
           <a:bodyPr wrap="square" lIns="0" tIns="0" rIns="0" bIns="0" rtlCol="0" anchor="ctr"/>
           <a:lstStyle/>
           <a:p>
-            <a:pPr algn="ctr" indent="0" marL="0">
-              <a:buNone/>
-            </a:pPr>
-            <a:r>
-              <a:rPr lang="en-US" sz="1050" b="1" spc="200" kern="0" dirty="0">
+            <a:pPr marL="0" indent="0" algn="ctr">
+              <a:buNone/>
+            </a:pPr>
+            <a:r>
+              <a:rPr lang="en-US" sz="1050" b="1" kern="0" spc="200" dirty="0">
                 <a:solidFill>
                   <a:srgbClr val="4A154B"/>
                 </a:solidFill>
@@ -4368,11 +4315,11 @@
           <a:bodyPr wrap="square" lIns="0" tIns="0" rIns="0" bIns="0" rtlCol="0" anchor="ctr"/>
           <a:lstStyle/>
           <a:p>
-            <a:pPr algn="l" indent="0" marL="0">
-              <a:buNone/>
-            </a:pPr>
-            <a:r>
-              <a:rPr lang="en-US" sz="2800" b="1" spc="-40" kern="0" dirty="0">
+            <a:pPr marL="0" indent="0" algn="l">
+              <a:buNone/>
+            </a:pPr>
+            <a:r>
+              <a:rPr lang="en-US" sz="2800" b="1" kern="0" spc="-40" dirty="0">
                 <a:solidFill>
                   <a:srgbClr val="4A154B"/>
                 </a:solidFill>
@@ -4407,7 +4354,7 @@
           <a:bodyPr wrap="square" lIns="0" tIns="0" rIns="0" bIns="0" rtlCol="0" anchor="ctr"/>
           <a:lstStyle/>
           <a:p>
-            <a:pPr algn="l" indent="0" marL="0">
+            <a:pPr marL="0" indent="0" algn="l">
               <a:buNone/>
             </a:pPr>
             <a:r>
@@ -4451,13 +4398,20 @@
             <a:prstDash val="solid"/>
           </a:ln>
           <a:effectLst>
-            <a:outerShdw sx="100000" sy="100000" kx="0" ky="0" algn="bl" rotWithShape="0" blurRad="139700" dist="38100" dir="5400000">
+            <a:outerShdw blurRad="139700" dist="38100" dir="5400000" algn="bl" rotWithShape="0">
               <a:srgbClr val="000000">
                 <a:alpha val="10000"/>
               </a:srgbClr>
             </a:outerShdw>
           </a:effectLst>
         </p:spPr>
+        <p:txBody>
+          <a:bodyPr/>
+          <a:lstStyle/>
+          <a:p>
+            <a:endParaRPr lang="ko-KR" altLang="en-US"/>
+          </a:p>
+        </p:txBody>
       </p:sp>
       <p:sp>
         <p:nvSpPr>
@@ -4480,7 +4434,7 @@
           <a:bodyPr wrap="square" lIns="0" tIns="0" rIns="0" bIns="0" rtlCol="0" anchor="ctr"/>
           <a:lstStyle/>
           <a:p>
-            <a:pPr indent="0" marL="0">
+            <a:pPr marL="0" indent="0">
               <a:buNone/>
             </a:pPr>
             <a:r>
@@ -4519,7 +4473,7 @@
           <a:bodyPr wrap="square" lIns="0" tIns="0" rIns="0" bIns="0" rtlCol="0" anchor="t"/>
           <a:lstStyle/>
           <a:p>
-            <a:pPr indent="0" marL="0">
+            <a:pPr marL="0" indent="0">
               <a:lnSpc>
                 <a:spcPct val="115000"/>
               </a:lnSpc>
@@ -4566,13 +4520,20 @@
             <a:prstDash val="solid"/>
           </a:ln>
           <a:effectLst>
-            <a:outerShdw sx="100000" sy="100000" kx="0" ky="0" algn="bl" rotWithShape="0" blurRad="139700" dist="38100" dir="5400000">
+            <a:outerShdw blurRad="139700" dist="38100" dir="5400000" algn="bl" rotWithShape="0">
               <a:srgbClr val="000000">
                 <a:alpha val="10000"/>
               </a:srgbClr>
             </a:outerShdw>
           </a:effectLst>
         </p:spPr>
+        <p:txBody>
+          <a:bodyPr/>
+          <a:lstStyle/>
+          <a:p>
+            <a:endParaRPr lang="ko-KR" altLang="en-US"/>
+          </a:p>
+        </p:txBody>
       </p:sp>
       <p:sp>
         <p:nvSpPr>
@@ -4595,7 +4556,7 @@
           <a:bodyPr wrap="square" lIns="0" tIns="0" rIns="0" bIns="0" rtlCol="0" anchor="ctr"/>
           <a:lstStyle/>
           <a:p>
-            <a:pPr indent="0" marL="0">
+            <a:pPr marL="0" indent="0">
               <a:buNone/>
             </a:pPr>
             <a:r>
@@ -4634,7 +4595,7 @@
           <a:bodyPr wrap="square" lIns="0" tIns="0" rIns="0" bIns="0" rtlCol="0" anchor="t"/>
           <a:lstStyle/>
           <a:p>
-            <a:pPr indent="0" marL="0">
+            <a:pPr marL="0" indent="0">
               <a:lnSpc>
                 <a:spcPct val="115000"/>
               </a:lnSpc>
@@ -4663,8 +4624,8 @@
         </p:nvSpPr>
         <p:spPr>
           <a:xfrm>
-            <a:off x="566928" y="3493008"/>
-            <a:ext cx="8010144" cy="274320"/>
+            <a:off x="566928" y="3493007"/>
+            <a:ext cx="8010144" cy="1311109"/>
           </a:xfrm>
           <a:prstGeom prst="rect">
             <a:avLst/>
@@ -4676,11 +4637,11 @@
           <a:bodyPr wrap="square" lIns="0" tIns="0" rIns="0" bIns="0" rtlCol="0" anchor="ctr"/>
           <a:lstStyle/>
           <a:p>
-            <a:pPr algn="ctr" indent="0" marL="0">
-              <a:buNone/>
-            </a:pPr>
-            <a:r>
-              <a:rPr lang="en-US" sz="1100" i="1" dirty="0">
+            <a:pPr marL="0" indent="0" algn="ctr">
+              <a:buNone/>
+            </a:pPr>
+            <a:r>
+              <a:rPr lang="en-US" sz="2000" b="1" i="1" dirty="0">
                 <a:solidFill>
                   <a:srgbClr val="696969"/>
                 </a:solidFill>
@@ -4690,325 +4651,7 @@
               </a:rPr>
               <a:t>유효 속도 = 기본속도 × 부스트 × 마비(0.5) · 트릭룸 시 음수로 반전 처리</a:t>
             </a:r>
-            <a:endParaRPr lang="en-US" sz="1100" dirty="0"/>
-          </a:p>
-        </p:txBody>
-      </p:sp>
-      <p:sp>
-        <p:nvSpPr>
-          <p:cNvPr id="13" name="Shape 11"/>
-          <p:cNvSpPr/>
-          <p:nvPr/>
-        </p:nvSpPr>
-        <p:spPr>
-          <a:xfrm>
-            <a:off x="566928" y="3886200"/>
-            <a:ext cx="8010144" cy="960120"/>
-          </a:xfrm>
-          <a:prstGeom prst="roundRect">
-            <a:avLst>
-              <a:gd name="adj" fmla="val 15238"/>
-            </a:avLst>
-          </a:prstGeom>
-          <a:solidFill>
-            <a:srgbClr val="4A154B"/>
-          </a:solidFill>
-          <a:ln/>
-          <a:effectLst>
-            <a:outerShdw sx="100000" sy="100000" kx="0" ky="0" algn="bl" rotWithShape="0" blurRad="139700" dist="38100" dir="5400000">
-              <a:srgbClr val="000000">
-                <a:alpha val="10000"/>
-              </a:srgbClr>
-            </a:outerShdw>
-          </a:effectLst>
-        </p:spPr>
-      </p:sp>
-      <p:sp>
-        <p:nvSpPr>
-          <p:cNvPr id="14" name="Text 12"/>
-          <p:cNvSpPr/>
-          <p:nvPr/>
-        </p:nvSpPr>
-        <p:spPr>
-          <a:xfrm>
-            <a:off x="566928" y="4014216"/>
-            <a:ext cx="2670048" cy="457200"/>
-          </a:xfrm>
-          <a:prstGeom prst="rect">
-            <a:avLst/>
-          </a:prstGeom>
-          <a:noFill/>
-          <a:ln/>
-        </p:spPr>
-        <p:txBody>
-          <a:bodyPr wrap="square" lIns="0" tIns="0" rIns="0" bIns="0" rtlCol="0" anchor="ctr"/>
-          <a:lstStyle/>
-          <a:p>
-            <a:pPr algn="ctr" indent="0" marL="0">
-              <a:buNone/>
-            </a:pPr>
-            <a:r>
-              <a:rPr lang="en-US" sz="2700" b="1" spc="-40" kern="0" dirty="0">
-                <a:solidFill>
-                  <a:srgbClr val="FFFFFF"/>
-                </a:solidFill>
-                <a:latin typeface="Inter" pitchFamily="34" charset="0"/>
-                <a:ea typeface="Inter" pitchFamily="34" charset="-122"/>
-                <a:cs typeface="Inter" pitchFamily="34" charset="-120"/>
-              </a:rPr>
-              <a:t>+5%p</a:t>
-            </a:r>
-            <a:endParaRPr lang="en-US" sz="2700" dirty="0"/>
-          </a:p>
-        </p:txBody>
-      </p:sp>
-      <p:sp>
-        <p:nvSpPr>
-          <p:cNvPr id="15" name="Text 13"/>
-          <p:cNvSpPr/>
-          <p:nvPr/>
-        </p:nvSpPr>
-        <p:spPr>
-          <a:xfrm>
-            <a:off x="658368" y="4471416"/>
-            <a:ext cx="2487168" cy="329184"/>
-          </a:xfrm>
-          <a:prstGeom prst="rect">
-            <a:avLst/>
-          </a:prstGeom>
-          <a:noFill/>
-          <a:ln/>
-        </p:spPr>
-        <p:txBody>
-          <a:bodyPr wrap="square" lIns="0" tIns="0" rIns="0" bIns="0" rtlCol="0" anchor="ctr"/>
-          <a:lstStyle/>
-          <a:p>
-            <a:pPr algn="ctr" indent="0" marL="0">
-              <a:lnSpc>
-                <a:spcPct val="100000"/>
-              </a:lnSpc>
-              <a:buNone/>
-            </a:pPr>
-            <a:r>
-              <a:rPr lang="en-US" sz="950" dirty="0">
-                <a:solidFill>
-                  <a:srgbClr val="D9BDDE"/>
-                </a:solidFill>
-                <a:latin typeface="Inter" pitchFamily="34" charset="0"/>
-                <a:ea typeface="Inter" pitchFamily="34" charset="-122"/>
-                <a:cs typeface="Inter" pitchFamily="34" charset="-120"/>
-              </a:rPr>
-              <a:t>Battle · Yamabuki  44.5 → 49.5% (P1)</a:t>
-            </a:r>
-            <a:endParaRPr lang="en-US" sz="950" dirty="0"/>
-          </a:p>
-        </p:txBody>
-      </p:sp>
-      <p:sp>
-        <p:nvSpPr>
-          <p:cNvPr id="16" name="Shape 14"/>
-          <p:cNvSpPr/>
-          <p:nvPr/>
-        </p:nvSpPr>
-        <p:spPr>
-          <a:xfrm>
-            <a:off x="3236976" y="4087368"/>
-            <a:ext cx="0" cy="557784"/>
-          </a:xfrm>
-          <a:prstGeom prst="line">
-            <a:avLst/>
-          </a:prstGeom>
-          <a:noFill/>
-          <a:ln w="12700">
-            <a:solidFill>
-              <a:srgbClr val="592466"/>
-            </a:solidFill>
-            <a:prstDash val="solid"/>
-          </a:ln>
-        </p:spPr>
-      </p:sp>
-      <p:sp>
-        <p:nvSpPr>
-          <p:cNvPr id="17" name="Text 15"/>
-          <p:cNvSpPr/>
-          <p:nvPr/>
-        </p:nvSpPr>
-        <p:spPr>
-          <a:xfrm>
-            <a:off x="3236976" y="4014216"/>
-            <a:ext cx="2670048" cy="457200"/>
-          </a:xfrm>
-          <a:prstGeom prst="rect">
-            <a:avLst/>
-          </a:prstGeom>
-          <a:noFill/>
-          <a:ln/>
-        </p:spPr>
-        <p:txBody>
-          <a:bodyPr wrap="square" lIns="0" tIns="0" rIns="0" bIns="0" rtlCol="0" anchor="ctr"/>
-          <a:lstStyle/>
-          <a:p>
-            <a:pPr algn="ctr" indent="0" marL="0">
-              <a:buNone/>
-            </a:pPr>
-            <a:r>
-              <a:rPr lang="en-US" sz="2700" b="1" spc="-40" kern="0" dirty="0">
-                <a:solidFill>
-                  <a:srgbClr val="FFFFFF"/>
-                </a:solidFill>
-                <a:latin typeface="Inter" pitchFamily="34" charset="0"/>
-                <a:ea typeface="Inter" pitchFamily="34" charset="-122"/>
-                <a:cs typeface="Inter" pitchFamily="34" charset="-120"/>
-              </a:rPr>
-              <a:t>71.3%</a:t>
-            </a:r>
-            <a:endParaRPr lang="en-US" sz="2700" dirty="0"/>
-          </a:p>
-        </p:txBody>
-      </p:sp>
-      <p:sp>
-        <p:nvSpPr>
-          <p:cNvPr id="18" name="Text 16"/>
-          <p:cNvSpPr/>
-          <p:nvPr/>
-        </p:nvSpPr>
-        <p:spPr>
-          <a:xfrm>
-            <a:off x="3328416" y="4471416"/>
-            <a:ext cx="2487168" cy="329184"/>
-          </a:xfrm>
-          <a:prstGeom prst="rect">
-            <a:avLst/>
-          </a:prstGeom>
-          <a:noFill/>
-          <a:ln/>
-        </p:spPr>
-        <p:txBody>
-          <a:bodyPr wrap="square" lIns="0" tIns="0" rIns="0" bIns="0" rtlCol="0" anchor="ctr"/>
-          <a:lstStyle/>
-          <a:p>
-            <a:pPr algn="ctr" indent="0" marL="0">
-              <a:lnSpc>
-                <a:spcPct val="100000"/>
-              </a:lnSpc>
-              <a:buNone/>
-            </a:pPr>
-            <a:r>
-              <a:rPr lang="en-US" sz="950" dirty="0">
-                <a:solidFill>
-                  <a:srgbClr val="D9BDDE"/>
-                </a:solidFill>
-                <a:latin typeface="Inter" pitchFamily="34" charset="0"/>
-                <a:ea typeface="Inter" pitchFamily="34" charset="-122"/>
-                <a:cs typeface="Inter" pitchFamily="34" charset="-120"/>
-              </a:rPr>
-              <a:t>Friends Championship 평균  (66 → 71.3)</a:t>
-            </a:r>
-            <a:endParaRPr lang="en-US" sz="950" dirty="0"/>
-          </a:p>
-        </p:txBody>
-      </p:sp>
-      <p:sp>
-        <p:nvSpPr>
-          <p:cNvPr id="19" name="Shape 17"/>
-          <p:cNvSpPr/>
-          <p:nvPr/>
-        </p:nvSpPr>
-        <p:spPr>
-          <a:xfrm>
-            <a:off x="5907024" y="4087368"/>
-            <a:ext cx="0" cy="557784"/>
-          </a:xfrm>
-          <a:prstGeom prst="line">
-            <a:avLst/>
-          </a:prstGeom>
-          <a:noFill/>
-          <a:ln w="12700">
-            <a:solidFill>
-              <a:srgbClr val="592466"/>
-            </a:solidFill>
-            <a:prstDash val="solid"/>
-          </a:ln>
-        </p:spPr>
-      </p:sp>
-      <p:sp>
-        <p:nvSpPr>
-          <p:cNvPr id="20" name="Text 18"/>
-          <p:cNvSpPr/>
-          <p:nvPr/>
-        </p:nvSpPr>
-        <p:spPr>
-          <a:xfrm>
-            <a:off x="5907024" y="4014216"/>
-            <a:ext cx="2670048" cy="457200"/>
-          </a:xfrm>
-          <a:prstGeom prst="rect">
-            <a:avLst/>
-          </a:prstGeom>
-          <a:noFill/>
-          <a:ln/>
-        </p:spPr>
-        <p:txBody>
-          <a:bodyPr wrap="square" lIns="0" tIns="0" rIns="0" bIns="0" rtlCol="0" anchor="ctr"/>
-          <a:lstStyle/>
-          <a:p>
-            <a:pPr algn="ctr" indent="0" marL="0">
-              <a:buNone/>
-            </a:pPr>
-            <a:r>
-              <a:rPr lang="en-US" sz="2700" b="1" spc="-40" kern="0" dirty="0">
-                <a:solidFill>
-                  <a:srgbClr val="FFFFFF"/>
-                </a:solidFill>
-                <a:latin typeface="Inter" pitchFamily="34" charset="0"/>
-                <a:ea typeface="Inter" pitchFamily="34" charset="-122"/>
-                <a:cs typeface="Inter" pitchFamily="34" charset="-120"/>
-              </a:rPr>
-              <a:t>+23</a:t>
-            </a:r>
-            <a:endParaRPr lang="en-US" sz="2700" dirty="0"/>
-          </a:p>
-        </p:txBody>
-      </p:sp>
-      <p:sp>
-        <p:nvSpPr>
-          <p:cNvPr id="21" name="Text 19"/>
-          <p:cNvSpPr/>
-          <p:nvPr/>
-        </p:nvSpPr>
-        <p:spPr>
-          <a:xfrm>
-            <a:off x="5998464" y="4471416"/>
-            <a:ext cx="2487168" cy="329184"/>
-          </a:xfrm>
-          <a:prstGeom prst="rect">
-            <a:avLst/>
-          </a:prstGeom>
-          <a:noFill/>
-          <a:ln/>
-        </p:spPr>
-        <p:txBody>
-          <a:bodyPr wrap="square" lIns="0" tIns="0" rIns="0" bIns="0" rtlCol="0" anchor="ctr"/>
-          <a:lstStyle/>
-          <a:p>
-            <a:pPr algn="ctr" indent="0" marL="0">
-              <a:lnSpc>
-                <a:spcPct val="100000"/>
-              </a:lnSpc>
-              <a:buNone/>
-            </a:pPr>
-            <a:r>
-              <a:rPr lang="en-US" sz="950" dirty="0">
-                <a:solidFill>
-                  <a:srgbClr val="D9BDDE"/>
-                </a:solidFill>
-                <a:latin typeface="Inter" pitchFamily="34" charset="0"/>
-                <a:ea typeface="Inter" pitchFamily="34" charset="-122"/>
-                <a:cs typeface="Inter" pitchFamily="34" charset="-120"/>
-              </a:rPr>
-              <a:t>Championship ELO  (공유약점 P4)</a:t>
-            </a:r>
-            <a:endParaRPr lang="en-US" sz="950" dirty="0"/>
+            <a:endParaRPr lang="en-US" sz="2000" b="1" dirty="0"/>
           </a:p>
         </p:txBody>
       </p:sp>
@@ -5313,4 +4956,319 @@
     </a:ext>
   </a:extLst>
 </a:theme>
+</file>
+
+<file path=ppt/theme/theme2.xml><?xml version="1.0" encoding="utf-8"?>
+<a:theme xmlns:a="http://schemas.openxmlformats.org/drawingml/2006/main" name="Office 테마">
+  <a:themeElements>
+    <a:clrScheme name="Office">
+      <a:dk1>
+        <a:sysClr val="windowText" lastClr="000000"/>
+      </a:dk1>
+      <a:lt1>
+        <a:sysClr val="window" lastClr="FFFFFF"/>
+      </a:lt1>
+      <a:dk2>
+        <a:srgbClr val="0E2841"/>
+      </a:dk2>
+      <a:lt2>
+        <a:srgbClr val="E8E8E8"/>
+      </a:lt2>
+      <a:accent1>
+        <a:srgbClr val="156082"/>
+      </a:accent1>
+      <a:accent2>
+        <a:srgbClr val="E97132"/>
+      </a:accent2>
+      <a:accent3>
+        <a:srgbClr val="196B24"/>
+      </a:accent3>
+      <a:accent4>
+        <a:srgbClr val="0F9ED5"/>
+      </a:accent4>
+      <a:accent5>
+        <a:srgbClr val="A02B93"/>
+      </a:accent5>
+      <a:accent6>
+        <a:srgbClr val="4EA72E"/>
+      </a:accent6>
+      <a:hlink>
+        <a:srgbClr val="467886"/>
+      </a:hlink>
+      <a:folHlink>
+        <a:srgbClr val="96607D"/>
+      </a:folHlink>
+    </a:clrScheme>
+    <a:fontScheme name="Office">
+      <a:majorFont>
+        <a:latin typeface="맑은 고딕" panose="02110004020202020204"/>
+        <a:ea typeface=""/>
+        <a:cs typeface=""/>
+        <a:font script="Jpan" typeface="游ゴシック Light"/>
+        <a:font script="Hang" typeface="맑은 고딕"/>
+        <a:font script="Hans" typeface="等线 Light"/>
+        <a:font script="Hant" typeface="新細明體"/>
+        <a:font script="Arab" typeface="Times New Roman"/>
+        <a:font script="Hebr" typeface="Times New Roman"/>
+        <a:font script="Thai" typeface="Angsana New"/>
+        <a:font script="Ethi" typeface="Nyala"/>
+        <a:font script="Beng" typeface="Vrinda"/>
+        <a:font script="Gujr" typeface="Shruti"/>
+        <a:font script="Khmr" typeface="MoolBoran"/>
+        <a:font script="Knda" typeface="Tunga"/>
+        <a:font script="Guru" typeface="Raavi"/>
+        <a:font script="Cans" typeface="Euphemia"/>
+        <a:font script="Cher" typeface="Plantagenet Cherokee"/>
+        <a:font script="Yiii" typeface="Microsoft Yi Baiti"/>
+        <a:font script="Tibt" typeface="Microsoft Himalaya"/>
+        <a:font script="Thaa" typeface="MV Boli"/>
+        <a:font script="Deva" typeface="Mangal"/>
+        <a:font script="Telu" typeface="Gautami"/>
+        <a:font script="Taml" typeface="Latha"/>
+        <a:font script="Syrc" typeface="Estrangelo Edessa"/>
+        <a:font script="Orya" typeface="Kalinga"/>
+        <a:font script="Mlym" typeface="Kartika"/>
+        <a:font script="Laoo" typeface="DokChampa"/>
+        <a:font script="Sinh" typeface="Iskoola Pota"/>
+        <a:font script="Mong" typeface="Mongolian Baiti"/>
+        <a:font script="Viet" typeface="Times New Roman"/>
+        <a:font script="Uigh" typeface="Microsoft Uighur"/>
+        <a:font script="Geor" typeface="Sylfaen"/>
+        <a:font script="Armn" typeface="Arial"/>
+        <a:font script="Bugi" typeface="Leelawadee UI"/>
+        <a:font script="Bopo" typeface="Microsoft JhengHei"/>
+        <a:font script="Java" typeface="Javanese Text"/>
+        <a:font script="Lisu" typeface="Segoe UI"/>
+        <a:font script="Mymr" typeface="Myanmar Text"/>
+        <a:font script="Nkoo" typeface="Ebrima"/>
+        <a:font script="Olck" typeface="Nirmala UI"/>
+        <a:font script="Osma" typeface="Ebrima"/>
+        <a:font script="Phag" typeface="Phagspa"/>
+        <a:font script="Syrn" typeface="Estrangelo Edessa"/>
+        <a:font script="Syrj" typeface="Estrangelo Edessa"/>
+        <a:font script="Syre" typeface="Estrangelo Edessa"/>
+        <a:font script="Sora" typeface="Nirmala UI"/>
+        <a:font script="Tale" typeface="Microsoft Tai Le"/>
+        <a:font script="Talu" typeface="Microsoft New Tai Lue"/>
+        <a:font script="Tfng" typeface="Ebrima"/>
+      </a:majorFont>
+      <a:minorFont>
+        <a:latin typeface="맑은 고딕" panose="02110004020202020204"/>
+        <a:ea typeface=""/>
+        <a:cs typeface=""/>
+        <a:font script="Jpan" typeface="游ゴシック"/>
+        <a:font script="Hang" typeface="맑은 고딕"/>
+        <a:font script="Hans" typeface="等线"/>
+        <a:font script="Hant" typeface="新細明體"/>
+        <a:font script="Arab" typeface="Arial"/>
+        <a:font script="Hebr" typeface="Arial"/>
+        <a:font script="Thai" typeface="Cordia New"/>
+        <a:font script="Ethi" typeface="Nyala"/>
+        <a:font script="Beng" typeface="Vrinda"/>
+        <a:font script="Gujr" typeface="Shruti"/>
+        <a:font script="Khmr" typeface="DaunPenh"/>
+        <a:font script="Knda" typeface="Tunga"/>
+        <a:font script="Guru" typeface="Raavi"/>
+        <a:font script="Cans" typeface="Euphemia"/>
+        <a:font script="Cher" typeface="Plantagenet Cherokee"/>
+        <a:font script="Yiii" typeface="Microsoft Yi Baiti"/>
+        <a:font script="Tibt" typeface="Microsoft Himalaya"/>
+        <a:font script="Thaa" typeface="MV Boli"/>
+        <a:font script="Deva" typeface="Mangal"/>
+        <a:font script="Telu" typeface="Gautami"/>
+        <a:font script="Taml" typeface="Latha"/>
+        <a:font script="Syrc" typeface="Estrangelo Edessa"/>
+        <a:font script="Orya" typeface="Kalinga"/>
+        <a:font script="Mlym" typeface="Kartika"/>
+        <a:font script="Laoo" typeface="DokChampa"/>
+        <a:font script="Sinh" typeface="Iskoola Pota"/>
+        <a:font script="Mong" typeface="Mongolian Baiti"/>
+        <a:font script="Viet" typeface="Arial"/>
+        <a:font script="Uigh" typeface="Microsoft Uighur"/>
+        <a:font script="Geor" typeface="Sylfaen"/>
+        <a:font script="Armn" typeface="Arial"/>
+        <a:font script="Bugi" typeface="Leelawadee UI"/>
+        <a:font script="Bopo" typeface="Microsoft JhengHei"/>
+        <a:font script="Java" typeface="Javanese Text"/>
+        <a:font script="Lisu" typeface="Segoe UI"/>
+        <a:font script="Mymr" typeface="Myanmar Text"/>
+        <a:font script="Nkoo" typeface="Ebrima"/>
+        <a:font script="Olck" typeface="Nirmala UI"/>
+        <a:font script="Osma" typeface="Ebrima"/>
+        <a:font script="Phag" typeface="Phagspa"/>
+        <a:font script="Syrn" typeface="Estrangelo Edessa"/>
+        <a:font script="Syrj" typeface="Estrangelo Edessa"/>
+        <a:font script="Syre" typeface="Estrangelo Edessa"/>
+        <a:font script="Sora" typeface="Nirmala UI"/>
+        <a:font script="Tale" typeface="Microsoft Tai Le"/>
+        <a:font script="Talu" typeface="Microsoft New Tai Lue"/>
+        <a:font script="Tfng" typeface="Ebrima"/>
+      </a:minorFont>
+    </a:fontScheme>
+    <a:fmtScheme name="Office">
+      <a:fillStyleLst>
+        <a:solidFill>
+          <a:schemeClr val="phClr"/>
+        </a:solidFill>
+        <a:gradFill rotWithShape="1">
+          <a:gsLst>
+            <a:gs pos="0">
+              <a:schemeClr val="phClr">
+                <a:lumMod val="110000"/>
+                <a:satMod val="105000"/>
+                <a:tint val="67000"/>
+              </a:schemeClr>
+            </a:gs>
+            <a:gs pos="50000">
+              <a:schemeClr val="phClr">
+                <a:lumMod val="105000"/>
+                <a:satMod val="103000"/>
+                <a:tint val="73000"/>
+              </a:schemeClr>
+            </a:gs>
+            <a:gs pos="100000">
+              <a:schemeClr val="phClr">
+                <a:lumMod val="105000"/>
+                <a:satMod val="109000"/>
+                <a:tint val="81000"/>
+              </a:schemeClr>
+            </a:gs>
+          </a:gsLst>
+          <a:lin ang="5400000" scaled="0"/>
+        </a:gradFill>
+        <a:gradFill rotWithShape="1">
+          <a:gsLst>
+            <a:gs pos="0">
+              <a:schemeClr val="phClr">
+                <a:satMod val="103000"/>
+                <a:lumMod val="102000"/>
+                <a:tint val="94000"/>
+              </a:schemeClr>
+            </a:gs>
+            <a:gs pos="50000">
+              <a:schemeClr val="phClr">
+                <a:satMod val="110000"/>
+                <a:lumMod val="100000"/>
+                <a:shade val="100000"/>
+              </a:schemeClr>
+            </a:gs>
+            <a:gs pos="100000">
+              <a:schemeClr val="phClr">
+                <a:lumMod val="99000"/>
+                <a:satMod val="120000"/>
+                <a:shade val="78000"/>
+              </a:schemeClr>
+            </a:gs>
+          </a:gsLst>
+          <a:lin ang="5400000" scaled="0"/>
+        </a:gradFill>
+      </a:fillStyleLst>
+      <a:lnStyleLst>
+        <a:ln w="12700" cap="flat" cmpd="sng" algn="ctr">
+          <a:solidFill>
+            <a:schemeClr val="phClr"/>
+          </a:solidFill>
+          <a:prstDash val="solid"/>
+          <a:miter lim="800000"/>
+        </a:ln>
+        <a:ln w="19050" cap="flat" cmpd="sng" algn="ctr">
+          <a:solidFill>
+            <a:schemeClr val="phClr"/>
+          </a:solidFill>
+          <a:prstDash val="solid"/>
+          <a:miter lim="800000"/>
+        </a:ln>
+        <a:ln w="25400" cap="flat" cmpd="sng" algn="ctr">
+          <a:solidFill>
+            <a:schemeClr val="phClr"/>
+          </a:solidFill>
+          <a:prstDash val="solid"/>
+          <a:miter lim="800000"/>
+        </a:ln>
+      </a:lnStyleLst>
+      <a:effectStyleLst>
+        <a:effectStyle>
+          <a:effectLst/>
+        </a:effectStyle>
+        <a:effectStyle>
+          <a:effectLst/>
+        </a:effectStyle>
+        <a:effectStyle>
+          <a:effectLst>
+            <a:outerShdw blurRad="57150" dist="19050" dir="5400000" algn="ctr" rotWithShape="0">
+              <a:srgbClr val="000000">
+                <a:alpha val="63000"/>
+              </a:srgbClr>
+            </a:outerShdw>
+          </a:effectLst>
+        </a:effectStyle>
+      </a:effectStyleLst>
+      <a:bgFillStyleLst>
+        <a:solidFill>
+          <a:schemeClr val="phClr"/>
+        </a:solidFill>
+        <a:solidFill>
+          <a:schemeClr val="phClr">
+            <a:tint val="95000"/>
+            <a:satMod val="170000"/>
+          </a:schemeClr>
+        </a:solidFill>
+        <a:gradFill rotWithShape="1">
+          <a:gsLst>
+            <a:gs pos="0">
+              <a:schemeClr val="phClr">
+                <a:tint val="93000"/>
+                <a:satMod val="150000"/>
+                <a:shade val="98000"/>
+                <a:lumMod val="102000"/>
+              </a:schemeClr>
+            </a:gs>
+            <a:gs pos="50000">
+              <a:schemeClr val="phClr">
+                <a:tint val="98000"/>
+                <a:satMod val="130000"/>
+                <a:shade val="90000"/>
+                <a:lumMod val="103000"/>
+              </a:schemeClr>
+            </a:gs>
+            <a:gs pos="100000">
+              <a:schemeClr val="phClr">
+                <a:shade val="63000"/>
+                <a:satMod val="120000"/>
+              </a:schemeClr>
+            </a:gs>
+          </a:gsLst>
+          <a:lin ang="5400000" scaled="0"/>
+        </a:gradFill>
+      </a:bgFillStyleLst>
+    </a:fmtScheme>
+  </a:themeElements>
+  <a:objectDefaults>
+    <a:lnDef>
+      <a:spPr/>
+      <a:bodyPr/>
+      <a:lstStyle/>
+      <a:style>
+        <a:lnRef idx="2">
+          <a:schemeClr val="accent1"/>
+        </a:lnRef>
+        <a:fillRef idx="0">
+          <a:schemeClr val="accent1"/>
+        </a:fillRef>
+        <a:effectRef idx="1">
+          <a:schemeClr val="accent1"/>
+        </a:effectRef>
+        <a:fontRef idx="minor">
+          <a:schemeClr val="tx1"/>
+        </a:fontRef>
+      </a:style>
+    </a:lnDef>
+  </a:objectDefaults>
+  <a:extraClrSchemeLst/>
+  <a:extLst>
+    <a:ext uri="{05A4C25C-085E-4340-85A3-A5531E510DB2}">
+      <thm15:themeFamily xmlns:thm15="http://schemas.microsoft.com/office/thememl/2012/main" name="Office Theme" id="{2E142A2C-CD16-42D6-873A-C26D2A0506FA}" vid="{1BDDFF52-6CD6-40A5-AB3C-68EB2F1E4D0A}"/>
+    </a:ext>
+  </a:extLst>
+</a:theme>
 </file>